--- a/ゲーム科1年/00_前期/ゲームプログラミングⅠ/17_円と円の当たり判定.pptx
+++ b/ゲーム科1年/00_前期/ゲームプログラミングⅠ/17_円と円の当たり判定.pptx
@@ -269,7 +269,7 @@
           <a:p>
             <a:fld id="{E9CC885B-4903-4D54-9A93-00025F12DED9}" type="datetimeFigureOut">
               <a:rPr kumimoji="1" lang="ja-JP" altLang="en-US" smtClean="0"/>
-              <a:t>2024/9/30</a:t>
+              <a:t>2025/3/3</a:t>
             </a:fld>
             <a:endParaRPr kumimoji="1" lang="ja-JP" altLang="en-US"/>
           </a:p>
@@ -499,7 +499,7 @@
           <a:p>
             <a:fld id="{E9CC885B-4903-4D54-9A93-00025F12DED9}" type="datetimeFigureOut">
               <a:rPr kumimoji="1" lang="ja-JP" altLang="en-US" smtClean="0"/>
-              <a:t>2024/9/30</a:t>
+              <a:t>2025/3/3</a:t>
             </a:fld>
             <a:endParaRPr kumimoji="1" lang="ja-JP" altLang="en-US"/>
           </a:p>
@@ -739,7 +739,7 @@
           <a:p>
             <a:fld id="{E9CC885B-4903-4D54-9A93-00025F12DED9}" type="datetimeFigureOut">
               <a:rPr kumimoji="1" lang="ja-JP" altLang="en-US" smtClean="0"/>
-              <a:t>2024/9/30</a:t>
+              <a:t>2025/3/3</a:t>
             </a:fld>
             <a:endParaRPr kumimoji="1" lang="ja-JP" altLang="en-US"/>
           </a:p>
@@ -969,7 +969,7 @@
           <a:p>
             <a:fld id="{E9CC885B-4903-4D54-9A93-00025F12DED9}" type="datetimeFigureOut">
               <a:rPr kumimoji="1" lang="ja-JP" altLang="en-US" smtClean="0"/>
-              <a:t>2024/9/30</a:t>
+              <a:t>2025/3/3</a:t>
             </a:fld>
             <a:endParaRPr kumimoji="1" lang="ja-JP" altLang="en-US"/>
           </a:p>
@@ -1244,7 +1244,7 @@
           <a:p>
             <a:fld id="{E9CC885B-4903-4D54-9A93-00025F12DED9}" type="datetimeFigureOut">
               <a:rPr kumimoji="1" lang="ja-JP" altLang="en-US" smtClean="0"/>
-              <a:t>2024/9/30</a:t>
+              <a:t>2025/3/3</a:t>
             </a:fld>
             <a:endParaRPr kumimoji="1" lang="ja-JP" altLang="en-US"/>
           </a:p>
@@ -1573,7 +1573,7 @@
           <a:p>
             <a:fld id="{E9CC885B-4903-4D54-9A93-00025F12DED9}" type="datetimeFigureOut">
               <a:rPr kumimoji="1" lang="ja-JP" altLang="en-US" smtClean="0"/>
-              <a:t>2024/9/30</a:t>
+              <a:t>2025/3/3</a:t>
             </a:fld>
             <a:endParaRPr kumimoji="1" lang="ja-JP" altLang="en-US"/>
           </a:p>
@@ -2049,7 +2049,7 @@
           <a:p>
             <a:fld id="{E9CC885B-4903-4D54-9A93-00025F12DED9}" type="datetimeFigureOut">
               <a:rPr kumimoji="1" lang="ja-JP" altLang="en-US" smtClean="0"/>
-              <a:t>2024/9/30</a:t>
+              <a:t>2025/3/3</a:t>
             </a:fld>
             <a:endParaRPr kumimoji="1" lang="ja-JP" altLang="en-US"/>
           </a:p>
@@ -2190,7 +2190,7 @@
           <a:p>
             <a:fld id="{E9CC885B-4903-4D54-9A93-00025F12DED9}" type="datetimeFigureOut">
               <a:rPr kumimoji="1" lang="ja-JP" altLang="en-US" smtClean="0"/>
-              <a:t>2024/9/30</a:t>
+              <a:t>2025/3/3</a:t>
             </a:fld>
             <a:endParaRPr kumimoji="1" lang="ja-JP" altLang="en-US"/>
           </a:p>
@@ -2303,7 +2303,7 @@
           <a:p>
             <a:fld id="{E9CC885B-4903-4D54-9A93-00025F12DED9}" type="datetimeFigureOut">
               <a:rPr kumimoji="1" lang="ja-JP" altLang="en-US" smtClean="0"/>
-              <a:t>2024/9/30</a:t>
+              <a:t>2025/3/3</a:t>
             </a:fld>
             <a:endParaRPr kumimoji="1" lang="ja-JP" altLang="en-US"/>
           </a:p>
@@ -2646,7 +2646,7 @@
           <a:p>
             <a:fld id="{E9CC885B-4903-4D54-9A93-00025F12DED9}" type="datetimeFigureOut">
               <a:rPr kumimoji="1" lang="ja-JP" altLang="en-US" smtClean="0"/>
-              <a:t>2024/9/30</a:t>
+              <a:t>2025/3/3</a:t>
             </a:fld>
             <a:endParaRPr kumimoji="1" lang="ja-JP" altLang="en-US"/>
           </a:p>
@@ -2934,7 +2934,7 @@
           <a:p>
             <a:fld id="{E9CC885B-4903-4D54-9A93-00025F12DED9}" type="datetimeFigureOut">
               <a:rPr kumimoji="1" lang="ja-JP" altLang="en-US" smtClean="0"/>
-              <a:t>2024/9/30</a:t>
+              <a:t>2025/3/3</a:t>
             </a:fld>
             <a:endParaRPr kumimoji="1" lang="ja-JP" altLang="en-US"/>
           </a:p>
@@ -3207,7 +3207,7 @@
           <a:p>
             <a:fld id="{E9CC885B-4903-4D54-9A93-00025F12DED9}" type="datetimeFigureOut">
               <a:rPr kumimoji="1" lang="ja-JP" altLang="en-US" smtClean="0"/>
-              <a:t>2024/9/30</a:t>
+              <a:t>2025/3/3</a:t>
             </a:fld>
             <a:endParaRPr kumimoji="1" lang="ja-JP" altLang="en-US"/>
           </a:p>
@@ -6257,8 +6257,8 @@
           </a:p>
         </p:txBody>
       </p:sp>
-      <mc:AlternateContent xmlns:mc="http://schemas.openxmlformats.org/markup-compatibility/2006">
-        <mc:Choice xmlns:a14="http://schemas.microsoft.com/office/drawing/2010/main" Requires="a14">
+      <mc:AlternateContent xmlns:mc="http://schemas.openxmlformats.org/markup-compatibility/2006" xmlns:a14="http://schemas.microsoft.com/office/drawing/2010/main">
+        <mc:Choice Requires="a14">
           <p:sp>
             <p:nvSpPr>
               <p:cNvPr id="3" name="テキスト ボックス 2">
@@ -6559,7 +6559,7 @@
             </p:txBody>
           </p:sp>
         </mc:Choice>
-        <mc:Fallback>
+        <mc:Fallback xmlns="">
           <p:sp>
             <p:nvSpPr>
               <p:cNvPr id="3" name="テキスト ボックス 2">
@@ -6702,7 +6702,11 @@
               <a:t>ルートの計算は</a:t>
             </a:r>
             <a:r>
-              <a:rPr lang="en-US" altLang="ja-JP" sz="2400" dirty="0" err="1"/>
+              <a:rPr lang="en-US" altLang="ja-JP" sz="2400" b="1" dirty="0" err="1">
+                <a:solidFill>
+                  <a:srgbClr val="FF0000"/>
+                </a:solidFill>
+              </a:rPr>
               <a:t>Math.h</a:t>
             </a:r>
             <a:r>

--- a/ゲーム科1年/00_前期/ゲームプログラミングⅠ/17_円と円の当たり判定.pptx
+++ b/ゲーム科1年/00_前期/ゲームプログラミングⅠ/17_円と円の当たり判定.pptx
@@ -269,7 +269,7 @@
           <a:p>
             <a:fld id="{E9CC885B-4903-4D54-9A93-00025F12DED9}" type="datetimeFigureOut">
               <a:rPr kumimoji="1" lang="ja-JP" altLang="en-US" smtClean="0"/>
-              <a:t>2025/3/3</a:t>
+              <a:t>2026/6/22</a:t>
             </a:fld>
             <a:endParaRPr kumimoji="1" lang="ja-JP" altLang="en-US"/>
           </a:p>
@@ -499,7 +499,7 @@
           <a:p>
             <a:fld id="{E9CC885B-4903-4D54-9A93-00025F12DED9}" type="datetimeFigureOut">
               <a:rPr kumimoji="1" lang="ja-JP" altLang="en-US" smtClean="0"/>
-              <a:t>2025/3/3</a:t>
+              <a:t>2026/6/22</a:t>
             </a:fld>
             <a:endParaRPr kumimoji="1" lang="ja-JP" altLang="en-US"/>
           </a:p>
@@ -739,7 +739,7 @@
           <a:p>
             <a:fld id="{E9CC885B-4903-4D54-9A93-00025F12DED9}" type="datetimeFigureOut">
               <a:rPr kumimoji="1" lang="ja-JP" altLang="en-US" smtClean="0"/>
-              <a:t>2025/3/3</a:t>
+              <a:t>2026/6/22</a:t>
             </a:fld>
             <a:endParaRPr kumimoji="1" lang="ja-JP" altLang="en-US"/>
           </a:p>
@@ -969,7 +969,7 @@
           <a:p>
             <a:fld id="{E9CC885B-4903-4D54-9A93-00025F12DED9}" type="datetimeFigureOut">
               <a:rPr kumimoji="1" lang="ja-JP" altLang="en-US" smtClean="0"/>
-              <a:t>2025/3/3</a:t>
+              <a:t>2026/6/22</a:t>
             </a:fld>
             <a:endParaRPr kumimoji="1" lang="ja-JP" altLang="en-US"/>
           </a:p>
@@ -1244,7 +1244,7 @@
           <a:p>
             <a:fld id="{E9CC885B-4903-4D54-9A93-00025F12DED9}" type="datetimeFigureOut">
               <a:rPr kumimoji="1" lang="ja-JP" altLang="en-US" smtClean="0"/>
-              <a:t>2025/3/3</a:t>
+              <a:t>2026/6/22</a:t>
             </a:fld>
             <a:endParaRPr kumimoji="1" lang="ja-JP" altLang="en-US"/>
           </a:p>
@@ -1573,7 +1573,7 @@
           <a:p>
             <a:fld id="{E9CC885B-4903-4D54-9A93-00025F12DED9}" type="datetimeFigureOut">
               <a:rPr kumimoji="1" lang="ja-JP" altLang="en-US" smtClean="0"/>
-              <a:t>2025/3/3</a:t>
+              <a:t>2026/6/22</a:t>
             </a:fld>
             <a:endParaRPr kumimoji="1" lang="ja-JP" altLang="en-US"/>
           </a:p>
@@ -2049,7 +2049,7 @@
           <a:p>
             <a:fld id="{E9CC885B-4903-4D54-9A93-00025F12DED9}" type="datetimeFigureOut">
               <a:rPr kumimoji="1" lang="ja-JP" altLang="en-US" smtClean="0"/>
-              <a:t>2025/3/3</a:t>
+              <a:t>2026/6/22</a:t>
             </a:fld>
             <a:endParaRPr kumimoji="1" lang="ja-JP" altLang="en-US"/>
           </a:p>
@@ -2190,7 +2190,7 @@
           <a:p>
             <a:fld id="{E9CC885B-4903-4D54-9A93-00025F12DED9}" type="datetimeFigureOut">
               <a:rPr kumimoji="1" lang="ja-JP" altLang="en-US" smtClean="0"/>
-              <a:t>2025/3/3</a:t>
+              <a:t>2026/6/22</a:t>
             </a:fld>
             <a:endParaRPr kumimoji="1" lang="ja-JP" altLang="en-US"/>
           </a:p>
@@ -2303,7 +2303,7 @@
           <a:p>
             <a:fld id="{E9CC885B-4903-4D54-9A93-00025F12DED9}" type="datetimeFigureOut">
               <a:rPr kumimoji="1" lang="ja-JP" altLang="en-US" smtClean="0"/>
-              <a:t>2025/3/3</a:t>
+              <a:t>2026/6/22</a:t>
             </a:fld>
             <a:endParaRPr kumimoji="1" lang="ja-JP" altLang="en-US"/>
           </a:p>
@@ -2646,7 +2646,7 @@
           <a:p>
             <a:fld id="{E9CC885B-4903-4D54-9A93-00025F12DED9}" type="datetimeFigureOut">
               <a:rPr kumimoji="1" lang="ja-JP" altLang="en-US" smtClean="0"/>
-              <a:t>2025/3/3</a:t>
+              <a:t>2026/6/22</a:t>
             </a:fld>
             <a:endParaRPr kumimoji="1" lang="ja-JP" altLang="en-US"/>
           </a:p>
@@ -2934,7 +2934,7 @@
           <a:p>
             <a:fld id="{E9CC885B-4903-4D54-9A93-00025F12DED9}" type="datetimeFigureOut">
               <a:rPr kumimoji="1" lang="ja-JP" altLang="en-US" smtClean="0"/>
-              <a:t>2025/3/3</a:t>
+              <a:t>2026/6/22</a:t>
             </a:fld>
             <a:endParaRPr kumimoji="1" lang="ja-JP" altLang="en-US"/>
           </a:p>
@@ -3207,7 +3207,7 @@
           <a:p>
             <a:fld id="{E9CC885B-4903-4D54-9A93-00025F12DED9}" type="datetimeFigureOut">
               <a:rPr kumimoji="1" lang="ja-JP" altLang="en-US" smtClean="0"/>
-              <a:t>2025/3/3</a:t>
+              <a:t>2026/6/22</a:t>
             </a:fld>
             <a:endParaRPr kumimoji="1" lang="ja-JP" altLang="en-US"/>
           </a:p>
@@ -4453,7 +4453,7 @@
         <p:spPr>
           <a:xfrm>
             <a:off x="567542" y="1216429"/>
-            <a:ext cx="5069016" cy="461665"/>
+            <a:ext cx="5190845" cy="461665"/>
           </a:xfrm>
           <a:prstGeom prst="rect">
             <a:avLst/>
@@ -4467,7 +4467,11 @@
           <a:lstStyle/>
           <a:p>
             <a:r>
-              <a:rPr lang="en-US" altLang="ja-JP" sz="2400" dirty="0"/>
+              <a:rPr lang="en-US" altLang="ja-JP" sz="2400" b="1" dirty="0">
+                <a:solidFill>
+                  <a:srgbClr val="FF0000"/>
+                </a:solidFill>
+              </a:rPr>
               <a:t>Collision.cpp</a:t>
             </a:r>
             <a:r>
